--- a/e2e/fixtures/cinematic-fragments.pptx
+++ b/e2e/fixtures/cinematic-fragments.pptx
@@ -526,7 +526,7 @@
       </p:grpSpPr>
       <p:sp>
         <p:nvSpPr>
-          <p:cNvPr id="3" name="TextBox 3"/>
+          <p:cNvPr id="2" name="TextBox 3"/>
           <p:cNvSpPr txBox="1"/>
           <p:nvPr/>
         </p:nvSpPr>
@@ -591,7 +591,7 @@
       </p:grpSpPr>
       <p:sp>
         <p:nvSpPr>
-          <p:cNvPr id="4" name="TextBox 4"/>
+          <p:cNvPr id="2" name="TextBox 4"/>
           <p:cNvSpPr txBox="1"/>
           <p:nvPr/>
         </p:nvSpPr>
@@ -656,7 +656,7 @@
       </p:grpSpPr>
       <p:sp>
         <p:nvSpPr>
-          <p:cNvPr id="5" name="TextBox 5"/>
+          <p:cNvPr id="2" name="TextBox 5"/>
           <p:cNvSpPr txBox="1"/>
           <p:nvPr/>
         </p:nvSpPr>
@@ -721,7 +721,7 @@
       </p:grpSpPr>
       <p:sp>
         <p:nvSpPr>
-          <p:cNvPr id="6" name="TextBox 6"/>
+          <p:cNvPr id="2" name="TextBox 6"/>
           <p:cNvSpPr txBox="1"/>
           <p:nvPr/>
         </p:nvSpPr>
@@ -786,7 +786,7 @@
       </p:grpSpPr>
       <p:sp>
         <p:nvSpPr>
-          <p:cNvPr id="7" name="TextBox 7"/>
+          <p:cNvPr id="2" name="TextBox 7"/>
           <p:cNvSpPr txBox="1"/>
           <p:nvPr/>
         </p:nvSpPr>
@@ -851,7 +851,7 @@
       </p:grpSpPr>
       <p:sp>
         <p:nvSpPr>
-          <p:cNvPr id="8" name="TextBox 8"/>
+          <p:cNvPr id="2" name="TextBox 8"/>
           <p:cNvSpPr txBox="1"/>
           <p:nvPr/>
         </p:nvSpPr>

--- a/e2e/fixtures/cinematic-fragments.pptx
+++ b/e2e/fixtures/cinematic-fragments.pptx
@@ -425,12 +425,10 @@
           <a:bodyPr wrap="square"/>
           <a:lstStyle/>
           <a:p>
-            <a:pPr/>
             <a:r>
-              <a:rPr lang="en-US" dirty="0" sz="2400" b="1"/>
+              <a:rPr lang="en-US" sz="2400" b="1" dirty="0"/>
               <a:t>Base Slide</a:t>
             </a:r>
-            <a:endParaRPr lang="en-US"/>
           </a:p>
         </p:txBody>
       </p:sp>
@@ -478,12 +476,10 @@
           <a:bodyPr wrap="square"/>
           <a:lstStyle/>
           <a:p>
-            <a:pPr/>
             <a:r>
-              <a:rPr lang="en-US" dirty="0" sz="2400" b="1"/>
+              <a:rPr lang="en-US" sz="2400" b="1" dirty="0"/>
               <a:t>Vortex Slide</a:t>
             </a:r>
-            <a:endParaRPr lang="en-US"/>
           </a:p>
         </p:txBody>
       </p:sp>
@@ -543,12 +539,10 @@
           <a:bodyPr wrap="square"/>
           <a:lstStyle/>
           <a:p>
-            <a:pPr/>
             <a:r>
-              <a:rPr lang="en-US" dirty="0" sz="2400" b="1"/>
+              <a:rPr lang="en-US" sz="2400" b="1" dirty="0"/>
               <a:t>Honeycomb Slide</a:t>
             </a:r>
-            <a:endParaRPr lang="en-US"/>
           </a:p>
         </p:txBody>
       </p:sp>
@@ -608,12 +602,10 @@
           <a:bodyPr wrap="square"/>
           <a:lstStyle/>
           <a:p>
-            <a:pPr/>
             <a:r>
-              <a:rPr lang="en-US" dirty="0" sz="2400" b="1"/>
+              <a:rPr lang="en-US" sz="2400" b="1" dirty="0"/>
               <a:t>Glitter Slide</a:t>
             </a:r>
-            <a:endParaRPr lang="en-US"/>
           </a:p>
         </p:txBody>
       </p:sp>
@@ -673,12 +665,10 @@
           <a:bodyPr wrap="square"/>
           <a:lstStyle/>
           <a:p>
-            <a:pPr/>
             <a:r>
-              <a:rPr lang="en-US" dirty="0" sz="2400" b="1"/>
+              <a:rPr lang="en-US" sz="2400" b="1" dirty="0"/>
               <a:t>Shred Slide</a:t>
             </a:r>
-            <a:endParaRPr lang="en-US"/>
           </a:p>
         </p:txBody>
       </p:sp>
@@ -738,12 +728,10 @@
           <a:bodyPr wrap="square"/>
           <a:lstStyle/>
           <a:p>
-            <a:pPr/>
             <a:r>
-              <a:rPr lang="en-US" dirty="0" sz="2400" b="1"/>
+              <a:rPr lang="en-US" sz="2400" b="1" dirty="0"/>
               <a:t>Fracture Slide</a:t>
             </a:r>
-            <a:endParaRPr lang="en-US"/>
           </a:p>
         </p:txBody>
       </p:sp>
@@ -803,12 +791,10 @@
           <a:bodyPr wrap="square"/>
           <a:lstStyle/>
           <a:p>
-            <a:pPr/>
             <a:r>
-              <a:rPr lang="en-US" dirty="0" sz="2400" b="1"/>
+              <a:rPr lang="en-US" sz="2400" b="1" dirty="0"/>
               <a:t>Curtains Slide</a:t>
             </a:r>
-            <a:endParaRPr lang="en-US"/>
           </a:p>
         </p:txBody>
       </p:sp>
@@ -868,12 +854,10 @@
           <a:bodyPr wrap="square"/>
           <a:lstStyle/>
           <a:p>
-            <a:pPr/>
             <a:r>
-              <a:rPr lang="en-US" dirty="0" sz="2400" b="1"/>
+              <a:rPr lang="en-US" sz="2400" b="1" dirty="0"/>
               <a:t>Airplane Slide</a:t>
             </a:r>
-            <a:endParaRPr lang="en-US"/>
           </a:p>
         </p:txBody>
       </p:sp>
